--- a/prezentacie/p05w.pptx
+++ b/prezentacie/p05w.pptx
@@ -250,7 +250,7 @@
           <a:p>
             <a:fld id="{10052495-8BC8-4CFB-94B1-B0429F101A0D}" type="datetimeFigureOut">
               <a:rPr lang="sk-SK" smtClean="0"/>
-              <a:t>29. 9. 2025</a:t>
+              <a:t>28. 9. 2026</a:t>
             </a:fld>
             <a:endParaRPr lang="sk-SK"/>
           </a:p>
@@ -420,7 +420,7 @@
           <a:p>
             <a:fld id="{10052495-8BC8-4CFB-94B1-B0429F101A0D}" type="datetimeFigureOut">
               <a:rPr lang="sk-SK" smtClean="0"/>
-              <a:t>29. 9. 2025</a:t>
+              <a:t>28. 9. 2026</a:t>
             </a:fld>
             <a:endParaRPr lang="sk-SK"/>
           </a:p>
@@ -600,7 +600,7 @@
           <a:p>
             <a:fld id="{10052495-8BC8-4CFB-94B1-B0429F101A0D}" type="datetimeFigureOut">
               <a:rPr lang="sk-SK" smtClean="0"/>
-              <a:t>29. 9. 2025</a:t>
+              <a:t>28. 9. 2026</a:t>
             </a:fld>
             <a:endParaRPr lang="sk-SK"/>
           </a:p>
@@ -770,7 +770,7 @@
           <a:p>
             <a:fld id="{10052495-8BC8-4CFB-94B1-B0429F101A0D}" type="datetimeFigureOut">
               <a:rPr lang="sk-SK" smtClean="0"/>
-              <a:t>29. 9. 2025</a:t>
+              <a:t>28. 9. 2026</a:t>
             </a:fld>
             <a:endParaRPr lang="sk-SK"/>
           </a:p>
@@ -1016,7 +1016,7 @@
           <a:p>
             <a:fld id="{10052495-8BC8-4CFB-94B1-B0429F101A0D}" type="datetimeFigureOut">
               <a:rPr lang="sk-SK" smtClean="0"/>
-              <a:t>29. 9. 2025</a:t>
+              <a:t>28. 9. 2026</a:t>
             </a:fld>
             <a:endParaRPr lang="sk-SK"/>
           </a:p>
@@ -1248,7 +1248,7 @@
           <a:p>
             <a:fld id="{10052495-8BC8-4CFB-94B1-B0429F101A0D}" type="datetimeFigureOut">
               <a:rPr lang="sk-SK" smtClean="0"/>
-              <a:t>29. 9. 2025</a:t>
+              <a:t>28. 9. 2026</a:t>
             </a:fld>
             <a:endParaRPr lang="sk-SK"/>
           </a:p>
@@ -1615,7 +1615,7 @@
           <a:p>
             <a:fld id="{10052495-8BC8-4CFB-94B1-B0429F101A0D}" type="datetimeFigureOut">
               <a:rPr lang="sk-SK" smtClean="0"/>
-              <a:t>29. 9. 2025</a:t>
+              <a:t>28. 9. 2026</a:t>
             </a:fld>
             <a:endParaRPr lang="sk-SK"/>
           </a:p>
@@ -1733,7 +1733,7 @@
           <a:p>
             <a:fld id="{10052495-8BC8-4CFB-94B1-B0429F101A0D}" type="datetimeFigureOut">
               <a:rPr lang="sk-SK" smtClean="0"/>
-              <a:t>29. 9. 2025</a:t>
+              <a:t>28. 9. 2026</a:t>
             </a:fld>
             <a:endParaRPr lang="sk-SK"/>
           </a:p>
@@ -1828,7 +1828,7 @@
           <a:p>
             <a:fld id="{10052495-8BC8-4CFB-94B1-B0429F101A0D}" type="datetimeFigureOut">
               <a:rPr lang="sk-SK" smtClean="0"/>
-              <a:t>29. 9. 2025</a:t>
+              <a:t>28. 9. 2026</a:t>
             </a:fld>
             <a:endParaRPr lang="sk-SK"/>
           </a:p>
@@ -2105,7 +2105,7 @@
           <a:p>
             <a:fld id="{10052495-8BC8-4CFB-94B1-B0429F101A0D}" type="datetimeFigureOut">
               <a:rPr lang="sk-SK" smtClean="0"/>
-              <a:t>29. 9. 2025</a:t>
+              <a:t>28. 9. 2026</a:t>
             </a:fld>
             <a:endParaRPr lang="sk-SK"/>
           </a:p>
@@ -2362,7 +2362,7 @@
           <a:p>
             <a:fld id="{10052495-8BC8-4CFB-94B1-B0429F101A0D}" type="datetimeFigureOut">
               <a:rPr lang="sk-SK" smtClean="0"/>
-              <a:t>29. 9. 2025</a:t>
+              <a:t>28. 9. 2026</a:t>
             </a:fld>
             <a:endParaRPr lang="sk-SK"/>
           </a:p>
@@ -2575,7 +2575,7 @@
           <a:p>
             <a:fld id="{10052495-8BC8-4CFB-94B1-B0429F101A0D}" type="datetimeFigureOut">
               <a:rPr lang="sk-SK" smtClean="0"/>
-              <a:t>29. 9. 2025</a:t>
+              <a:t>28. 9. 2026</a:t>
             </a:fld>
             <a:endParaRPr lang="sk-SK"/>
           </a:p>
@@ -3517,7 +3517,7 @@
             </a:br>
             <a:r>
               <a:rPr lang="sk-SK" b="1" dirty="0"/>
-              <a:t>Ing. Jozef Wagner PhD.</a:t>
+              <a:t>Ing. Jozef Wagner, PhD.</a:t>
             </a:r>
           </a:p>
           <a:p>
@@ -4224,7 +4224,26 @@
             </a:pPr>
             <a:r>
               <a:rPr lang="sk-SK" dirty="0"/>
-              <a:t>nástroj na spravovanie distribučných balíkov - knižníc</a:t>
+              <a:t>nástroj na </a:t>
+            </a:r>
+            <a:r>
+              <a:rPr lang="sk-SK" dirty="0">
+                <a:solidFill>
+                  <a:srgbClr val="FF0000"/>
+                </a:solidFill>
+                <a:highlight>
+                  <a:srgbClr val="00FFFF"/>
+                </a:highlight>
+              </a:rPr>
+              <a:t>spravovanie distribučných balíkov </a:t>
+            </a:r>
+            <a:r>
+              <a:rPr lang="en-US" dirty="0"/>
+              <a:t> -</a:t>
+            </a:r>
+            <a:r>
+              <a:rPr lang="sk-SK" dirty="0"/>
+              <a:t> knižníc</a:t>
             </a:r>
           </a:p>
           <a:p>
@@ -4236,6 +4255,9 @@
             </a:pPr>
             <a:r>
               <a:rPr lang="sk-SK" dirty="0" err="1">
+                <a:solidFill>
+                  <a:srgbClr val="FF0000"/>
+                </a:solidFill>
                 <a:highlight>
                   <a:srgbClr val="FFFF00"/>
                 </a:highlight>
@@ -4244,16 +4266,15 @@
               <a:t>pip</a:t>
             </a:r>
             <a:r>
-              <a:rPr lang="sk-SK" dirty="0"/>
-              <a:t> knižnice sa v </a:t>
-            </a:r>
-            <a:r>
-              <a:rPr lang="sk-SK" dirty="0" err="1"/>
-              <a:t>Pythone</a:t>
-            </a:r>
-            <a:r>
-              <a:rPr lang="sk-SK" dirty="0"/>
-              <a:t> inštalujú globálne</a:t>
+              <a:rPr lang="sk-SK" dirty="0">
+                <a:solidFill>
+                  <a:srgbClr val="FF0000"/>
+                </a:solidFill>
+                <a:highlight>
+                  <a:srgbClr val="00FFFF"/>
+                </a:highlight>
+              </a:rPr>
+              <a:t> knižnice sa inštalujú globálne</a:t>
             </a:r>
           </a:p>
           <a:p>
@@ -4264,8 +4285,15 @@
               <a:buNone/>
             </a:pPr>
             <a:r>
-              <a:rPr lang="sk-SK" dirty="0"/>
-              <a:t>Nemôžeme mať naraz nainštalované 2 verzie tej istej knižnice</a:t>
+              <a:rPr lang="sk-SK" dirty="0">
+                <a:solidFill>
+                  <a:srgbClr val="FF0000"/>
+                </a:solidFill>
+                <a:highlight>
+                  <a:srgbClr val="00FFFF"/>
+                </a:highlight>
+              </a:rPr>
+              <a:t>Nemôžeme mať naraz 2 verzie tej istej knižnice</a:t>
             </a:r>
           </a:p>
           <a:p>
@@ -4286,6 +4314,9 @@
             </a:pPr>
             <a:r>
               <a:rPr lang="sk-SK" dirty="0" err="1">
+                <a:solidFill>
+                  <a:srgbClr val="FF0000"/>
+                </a:solidFill>
                 <a:highlight>
                   <a:srgbClr val="FFFF00"/>
                 </a:highlight>
@@ -4295,6 +4326,9 @@
             </a:r>
             <a:r>
               <a:rPr lang="sk-SK" dirty="0">
+                <a:solidFill>
+                  <a:srgbClr val="FF0000"/>
+                </a:solidFill>
                 <a:highlight>
                   <a:srgbClr val="FFFF00"/>
                 </a:highlight>
@@ -4312,6 +4346,9 @@
             </a:pPr>
             <a:r>
               <a:rPr lang="sk-SK" dirty="0" err="1">
+                <a:solidFill>
+                  <a:srgbClr val="FF0000"/>
+                </a:solidFill>
                 <a:highlight>
                   <a:srgbClr val="FFFF00"/>
                 </a:highlight>
@@ -4321,6 +4358,9 @@
             </a:r>
             <a:r>
               <a:rPr lang="sk-SK" dirty="0">
+                <a:solidFill>
+                  <a:srgbClr val="FF0000"/>
+                </a:solidFill>
                 <a:highlight>
                   <a:srgbClr val="FFFF00"/>
                 </a:highlight>
@@ -4330,6 +4370,9 @@
             </a:r>
             <a:r>
               <a:rPr lang="sk-SK" dirty="0" err="1">
+                <a:solidFill>
+                  <a:srgbClr val="FF0000"/>
+                </a:solidFill>
                 <a:highlight>
                   <a:srgbClr val="FFFF00"/>
                 </a:highlight>
@@ -4339,6 +4382,9 @@
             </a:r>
             <a:r>
               <a:rPr lang="sk-SK" dirty="0">
+                <a:solidFill>
+                  <a:srgbClr val="FF0000"/>
+                </a:solidFill>
                 <a:highlight>
                   <a:srgbClr val="FFFF00"/>
                 </a:highlight>
@@ -4348,6 +4394,9 @@
             </a:r>
             <a:r>
               <a:rPr lang="sk-SK" dirty="0" err="1">
+                <a:solidFill>
+                  <a:srgbClr val="FF0000"/>
+                </a:solidFill>
                 <a:highlight>
                   <a:srgbClr val="FFFF00"/>
                 </a:highlight>
@@ -4357,6 +4406,9 @@
             </a:r>
             <a:r>
               <a:rPr lang="sk-SK" dirty="0">
+                <a:solidFill>
+                  <a:srgbClr val="FF0000"/>
+                </a:solidFill>
                 <a:highlight>
                   <a:srgbClr val="FFFF00"/>
                 </a:highlight>
@@ -4374,6 +4426,9 @@
             </a:pPr>
             <a:r>
               <a:rPr lang="sk-SK" dirty="0" err="1">
+                <a:solidFill>
+                  <a:srgbClr val="FF0000"/>
+                </a:solidFill>
                 <a:highlight>
                   <a:srgbClr val="FFFF00"/>
                 </a:highlight>
@@ -4383,6 +4438,9 @@
             </a:r>
             <a:r>
               <a:rPr lang="sk-SK" dirty="0">
+                <a:solidFill>
+                  <a:srgbClr val="FF0000"/>
+                </a:solidFill>
                 <a:highlight>
                   <a:srgbClr val="FFFF00"/>
                 </a:highlight>
@@ -4392,6 +4450,9 @@
             </a:r>
             <a:r>
               <a:rPr lang="sk-SK" dirty="0" err="1">
+                <a:solidFill>
+                  <a:srgbClr val="FF0000"/>
+                </a:solidFill>
                 <a:highlight>
                   <a:srgbClr val="FFFF00"/>
                 </a:highlight>
@@ -4401,6 +4462,9 @@
             </a:r>
             <a:r>
               <a:rPr lang="sk-SK" dirty="0">
+                <a:solidFill>
+                  <a:srgbClr val="FF0000"/>
+                </a:solidFill>
                 <a:highlight>
                   <a:srgbClr val="FFFF00"/>
                 </a:highlight>
@@ -4410,6 +4474,9 @@
             </a:r>
             <a:r>
               <a:rPr lang="sk-SK" dirty="0" err="1">
+                <a:solidFill>
+                  <a:srgbClr val="FF0000"/>
+                </a:solidFill>
                 <a:highlight>
                   <a:srgbClr val="FFFF00"/>
                 </a:highlight>
@@ -4419,6 +4486,9 @@
             </a:r>
             <a:r>
               <a:rPr lang="sk-SK" dirty="0">
+                <a:solidFill>
+                  <a:srgbClr val="FF0000"/>
+                </a:solidFill>
                 <a:highlight>
                   <a:srgbClr val="FFFF00"/>
                 </a:highlight>
@@ -4451,10 +4521,24 @@
           <a:lstStyle/>
           <a:p>
             <a:r>
-              <a:rPr lang="sk-SK" dirty="0" err="1"/>
+              <a:rPr lang="sk-SK" dirty="0" err="1">
+                <a:solidFill>
+                  <a:srgbClr val="FF0000"/>
+                </a:solidFill>
+                <a:highlight>
+                  <a:srgbClr val="00FFFF"/>
+                </a:highlight>
+              </a:rPr>
               <a:t>pip</a:t>
             </a:r>
-            <a:endParaRPr lang="sk-SK" dirty="0"/>
+            <a:endParaRPr lang="sk-SK" dirty="0">
+              <a:solidFill>
+                <a:srgbClr val="FF0000"/>
+              </a:solidFill>
+              <a:highlight>
+                <a:srgbClr val="00FFFF"/>
+              </a:highlight>
+            </a:endParaRPr>
           </a:p>
         </p:txBody>
       </p:sp>
@@ -4531,18 +4615,94 @@
           <a:lstStyle/>
           <a:p>
             <a:pPr marL="0" indent="0">
+              <a:lnSpc>
+                <a:spcPct val="110000"/>
+              </a:lnSpc>
               <a:spcBef>
                 <a:spcPts val="1200"/>
               </a:spcBef>
               <a:buNone/>
             </a:pPr>
             <a:r>
-              <a:rPr lang="sk-SK" dirty="0"/>
-              <a:t>Izolovaný priestor, ktorý má vlastnú sadu knižníc</a:t>
-            </a:r>
+              <a:rPr lang="sk-SK" dirty="0">
+                <a:solidFill>
+                  <a:srgbClr val="FF0000"/>
+                </a:solidFill>
+                <a:highlight>
+                  <a:srgbClr val="00FFFF"/>
+                </a:highlight>
+              </a:rPr>
+              <a:t>Izolovaný priestor</a:t>
+            </a:r>
+            <a:r>
+              <a:rPr lang="en-US" dirty="0">
+                <a:solidFill>
+                  <a:srgbClr val="FF0000"/>
+                </a:solidFill>
+                <a:highlight>
+                  <a:srgbClr val="00FFFF"/>
+                </a:highlight>
+              </a:rPr>
+              <a:t> pre python a </a:t>
+            </a:r>
+            <a:r>
+              <a:rPr lang="sk-SK" dirty="0" err="1">
+                <a:solidFill>
+                  <a:srgbClr val="FF0000"/>
+                </a:solidFill>
+                <a:highlight>
+                  <a:srgbClr val="00FFFF"/>
+                </a:highlight>
+              </a:rPr>
+              <a:t>knižn</a:t>
+            </a:r>
+            <a:r>
+              <a:rPr lang="en-US" dirty="0" err="1">
+                <a:solidFill>
+                  <a:srgbClr val="FF0000"/>
+                </a:solidFill>
+                <a:highlight>
+                  <a:srgbClr val="00FFFF"/>
+                </a:highlight>
+              </a:rPr>
+              <a:t>i</a:t>
+            </a:r>
+            <a:r>
+              <a:rPr lang="sk-SK" dirty="0">
+                <a:solidFill>
+                  <a:srgbClr val="FF0000"/>
+                </a:solidFill>
+                <a:highlight>
+                  <a:srgbClr val="00FFFF"/>
+                </a:highlight>
+              </a:rPr>
+              <a:t>c</a:t>
+            </a:r>
+            <a:r>
+              <a:rPr lang="en-US" dirty="0">
+                <a:solidFill>
+                  <a:srgbClr val="FF0000"/>
+                </a:solidFill>
+                <a:highlight>
+                  <a:srgbClr val="00FFFF"/>
+                </a:highlight>
+              </a:rPr>
+              <a:t>e</a:t>
+            </a:r>
+            <a:endParaRPr lang="sk-SK" dirty="0">
+              <a:solidFill>
+                <a:srgbClr val="FF0000"/>
+              </a:solidFill>
+              <a:highlight>
+                <a:srgbClr val="00FFFF"/>
+              </a:highlight>
+            </a:endParaRPr>
           </a:p>
           <a:p>
             <a:pPr marL="0" indent="0">
+              <a:lnSpc>
+                <a:spcPct val="110000"/>
+              </a:lnSpc>
               <a:spcBef>
                 <a:spcPts val="1200"/>
               </a:spcBef>
@@ -4550,11 +4710,25 @@
             </a:pPr>
             <a:r>
               <a:rPr lang="sk-SK" dirty="0"/>
-              <a:t>Knižnice neovplyvňujú iné virtuálne prostredia a nie sú viditeľné ani zo systému</a:t>
+              <a:t>Knižnice </a:t>
+            </a:r>
+            <a:r>
+              <a:rPr lang="sk-SK" dirty="0">
+                <a:solidFill>
+                  <a:srgbClr val="FF0000"/>
+                </a:solidFill>
+                <a:highlight>
+                  <a:srgbClr val="00FFFF"/>
+                </a:highlight>
+              </a:rPr>
+              <a:t>neovplyvňujú iné virtuálne prostredia a nie sú viditeľné ani zo systému</a:t>
             </a:r>
           </a:p>
           <a:p>
             <a:pPr marL="0" indent="0">
+              <a:lnSpc>
+                <a:spcPct val="110000"/>
+              </a:lnSpc>
               <a:spcBef>
                 <a:spcPts val="1200"/>
               </a:spcBef>
@@ -4562,10 +4736,28 @@
             </a:pPr>
             <a:r>
               <a:rPr lang="sk-SK" dirty="0"/>
-              <a:t>Virtuálne prostredie potrebuje svoj vlastný adresár, väčšinou je to </a:t>
+              <a:t>Virtuálne prostredie </a:t>
             </a:r>
             <a:r>
               <a:rPr lang="sk-SK" dirty="0">
+                <a:solidFill>
+                  <a:srgbClr val="FF0000"/>
+                </a:solidFill>
+                <a:highlight>
+                  <a:srgbClr val="00FFFF"/>
+                </a:highlight>
+              </a:rPr>
+              <a:t>potrebuje svoj vlastný adresár</a:t>
+            </a:r>
+            <a:r>
+              <a:rPr lang="sk-SK" dirty="0"/>
+              <a:t>, väčšinou je to </a:t>
+            </a:r>
+            <a:r>
+              <a:rPr lang="sk-SK" dirty="0">
+                <a:solidFill>
+                  <a:srgbClr val="FF0000"/>
+                </a:solidFill>
                 <a:highlight>
                   <a:srgbClr val="FFFF00"/>
                 </a:highlight>
@@ -4575,6 +4767,9 @@
             </a:r>
             <a:r>
               <a:rPr lang="sk-SK" dirty="0" err="1">
+                <a:solidFill>
+                  <a:srgbClr val="FF0000"/>
+                </a:solidFill>
                 <a:highlight>
                   <a:srgbClr val="FFFF00"/>
                 </a:highlight>
@@ -4583,6 +4778,9 @@
               <a:t>venv</a:t>
             </a:r>
             <a:endParaRPr lang="sk-SK" dirty="0">
+              <a:solidFill>
+                <a:srgbClr val="FF0000"/>
+              </a:solidFill>
               <a:highlight>
                 <a:srgbClr val="FFFF00"/>
               </a:highlight>
@@ -4613,7 +4811,14 @@
           <a:lstStyle/>
           <a:p>
             <a:r>
-              <a:rPr lang="sk-SK" dirty="0"/>
+              <a:rPr lang="sk-SK" dirty="0">
+                <a:solidFill>
+                  <a:srgbClr val="FF0000"/>
+                </a:solidFill>
+                <a:highlight>
+                  <a:srgbClr val="00FFFF"/>
+                </a:highlight>
+              </a:rPr>
               <a:t>Virtuálne prostredie</a:t>
             </a:r>
           </a:p>
@@ -4693,7 +4898,7 @@
           <a:p>
             <a:pPr marL="0" indent="0">
               <a:lnSpc>
-                <a:spcPct val="100000"/>
+                <a:spcPct val="110000"/>
               </a:lnSpc>
               <a:spcBef>
                 <a:spcPts val="1200"/>
@@ -4726,6 +4931,9 @@
             </a:r>
             <a:r>
               <a:rPr lang="sk-SK" dirty="0">
+                <a:solidFill>
+                  <a:srgbClr val="FF0000"/>
+                </a:solidFill>
                 <a:highlight>
                   <a:srgbClr val="FFFF00"/>
                 </a:highlight>
@@ -4737,7 +4945,7 @@
           <a:p>
             <a:pPr marL="0" indent="0">
               <a:lnSpc>
-                <a:spcPct val="100000"/>
+                <a:spcPct val="110000"/>
               </a:lnSpc>
               <a:spcBef>
                 <a:spcPts val="1200"/>
@@ -4745,7 +4953,50 @@
               <a:buNone/>
             </a:pPr>
             <a:r>
+              <a:rPr kumimoji="0" lang="en-US" sz="2800" b="0" i="0" u="none" strike="noStrike" kern="1200" cap="none" spc="0" normalizeH="0" baseline="0" noProof="0" dirty="0" err="1">
+                <a:ln>
+                  <a:noFill/>
+                </a:ln>
+                <a:solidFill>
+                  <a:srgbClr val="FF0000"/>
+                </a:solidFill>
+                <a:effectLst/>
+                <a:highlight>
+                  <a:srgbClr val="00FFFF"/>
+                </a:highlight>
+                <a:uLnTx/>
+                <a:uFillTx/>
+                <a:latin typeface="Aptos" panose="02110004020202020204"/>
+                <a:ea typeface="+mn-ea"/>
+                <a:cs typeface="+mn-cs"/>
+              </a:rPr>
+              <a:t>Repozit</a:t>
+            </a:r>
+            <a:r>
+              <a:rPr kumimoji="0" lang="sk-SK" sz="2800" b="0" i="0" u="none" strike="noStrike" kern="1200" cap="none" spc="0" normalizeH="0" baseline="0" noProof="0" dirty="0">
+                <a:ln>
+                  <a:noFill/>
+                </a:ln>
+                <a:solidFill>
+                  <a:srgbClr val="FF0000"/>
+                </a:solidFill>
+                <a:effectLst/>
+                <a:highlight>
+                  <a:srgbClr val="00FFFF"/>
+                </a:highlight>
+                <a:uLnTx/>
+                <a:uFillTx/>
+                <a:latin typeface="Aptos" panose="02110004020202020204"/>
+                <a:ea typeface="+mn-ea"/>
+                <a:cs typeface="+mn-cs"/>
+              </a:rPr>
+              <a:t>ár </a:t>
+            </a:r>
+            <a:r>
               <a:rPr lang="sk-SK" dirty="0" err="1">
+                <a:solidFill>
+                  <a:srgbClr val="FF0000"/>
+                </a:solidFill>
                 <a:highlight>
                   <a:srgbClr val="FFFF00"/>
                 </a:highlight>
@@ -4754,14 +5005,21 @@
               <a:t>pip</a:t>
             </a:r>
             <a:r>
-              <a:rPr lang="sk-SK" dirty="0"/>
-              <a:t> balíky sa sťahujú práve z tohto repozitára</a:t>
+              <a:rPr lang="sk-SK" dirty="0">
+                <a:solidFill>
+                  <a:srgbClr val="FF0000"/>
+                </a:solidFill>
+                <a:highlight>
+                  <a:srgbClr val="00FFFF"/>
+                </a:highlight>
+              </a:rPr>
+              <a:t> balíkov</a:t>
             </a:r>
           </a:p>
           <a:p>
             <a:pPr marL="0" indent="0">
               <a:lnSpc>
-                <a:spcPct val="100000"/>
+                <a:spcPct val="110000"/>
               </a:lnSpc>
               <a:spcBef>
                 <a:spcPts val="1200"/>
@@ -4769,12 +5027,22 @@
               <a:buNone/>
             </a:pPr>
             <a:r>
-              <a:rPr lang="sk-SK" dirty="0"/>
+              <a:rPr lang="sk-SK" dirty="0">
+                <a:solidFill>
+                  <a:srgbClr val="FF0000"/>
+                </a:solidFill>
+                <a:highlight>
+                  <a:srgbClr val="00FFFF"/>
+                </a:highlight>
+              </a:rPr>
               <a:t>Viem v ňom zverejniť zadarmo aj svoje balíky</a:t>
             </a:r>
             <a:endParaRPr lang="sk-SK" dirty="0">
+              <a:solidFill>
+                <a:srgbClr val="FF0000"/>
+              </a:solidFill>
               <a:highlight>
-                <a:srgbClr val="FFFF00"/>
+                <a:srgbClr val="00FFFF"/>
               </a:highlight>
               <a:latin typeface="Consolas" panose="020B0609020204030204" pitchFamily="49" charset="0"/>
             </a:endParaRPr>
@@ -4803,7 +5071,14 @@
           <a:lstStyle/>
           <a:p>
             <a:r>
-              <a:rPr lang="sk-SK" dirty="0"/>
+              <a:rPr lang="sk-SK" dirty="0">
+                <a:solidFill>
+                  <a:srgbClr val="FF0000"/>
+                </a:solidFill>
+                <a:highlight>
+                  <a:srgbClr val="00FFFF"/>
+                </a:highlight>
+              </a:rPr>
               <a:t>pypi.org</a:t>
             </a:r>
           </a:p>
@@ -4888,8 +5163,19 @@
               <a:buNone/>
             </a:pPr>
             <a:r>
+              <a:rPr lang="sk-SK" dirty="0">
+                <a:solidFill>
+                  <a:srgbClr val="FF0000"/>
+                </a:solidFill>
+                <a:highlight>
+                  <a:srgbClr val="00FFFF"/>
+                </a:highlight>
+              </a:rPr>
+              <a:t>Starý spôsob písania závislostí</a:t>
+            </a:r>
+            <a:r>
               <a:rPr lang="sk-SK" dirty="0"/>
-              <a:t>Starý spôsob písania závislostí, do textového súboru</a:t>
+              <a:t>, do textového súboru</a:t>
             </a:r>
           </a:p>
           <a:p>
@@ -4900,8 +5186,19 @@
               <a:buNone/>
             </a:pPr>
             <a:r>
+              <a:rPr lang="sk-SK" dirty="0">
+                <a:solidFill>
+                  <a:srgbClr val="FF0000"/>
+                </a:solidFill>
+                <a:highlight>
+                  <a:srgbClr val="00FFFF"/>
+                </a:highlight>
+              </a:rPr>
+              <a:t>Iba názov knižnice a verzia</a:t>
+            </a:r>
+            <a:r>
               <a:rPr lang="sk-SK" dirty="0"/>
-              <a:t>Okrem názvu knižnice vieme uviesť verziu.</a:t>
+              <a:t>.</a:t>
             </a:r>
           </a:p>
           <a:p>
@@ -4913,10 +5210,32 @@
             </a:pPr>
             <a:r>
               <a:rPr lang="sk-SK" dirty="0"/>
-              <a:t>Vieme na to použiť operátory </a:t>
+              <a:t>Vieme na to použiť </a:t>
             </a:r>
             <a:r>
               <a:rPr lang="sk-SK" dirty="0">
+                <a:solidFill>
+                  <a:srgbClr val="FF0000"/>
+                </a:solidFill>
+                <a:highlight>
+                  <a:srgbClr val="00FFFF"/>
+                </a:highlight>
+              </a:rPr>
+              <a:t>operátory</a:t>
+            </a:r>
+            <a:r>
+              <a:rPr lang="sk-SK" dirty="0">
+                <a:solidFill>
+                  <a:srgbClr val="FF0000"/>
+                </a:solidFill>
+              </a:rPr>
+              <a:t> </a:t>
+            </a:r>
+            <a:r>
+              <a:rPr lang="sk-SK" dirty="0">
+                <a:solidFill>
+                  <a:srgbClr val="FF0000"/>
+                </a:solidFill>
                 <a:highlight>
                   <a:srgbClr val="FFFF00"/>
                 </a:highlight>
@@ -4925,11 +5244,18 @@
               <a:t>==</a:t>
             </a:r>
             <a:r>
-              <a:rPr lang="sk-SK" dirty="0"/>
+              <a:rPr lang="sk-SK" dirty="0">
+                <a:solidFill>
+                  <a:srgbClr val="FF0000"/>
+                </a:solidFill>
+              </a:rPr>
               <a:t>, </a:t>
             </a:r>
             <a:r>
               <a:rPr lang="sk-SK" dirty="0">
+                <a:solidFill>
+                  <a:srgbClr val="FF0000"/>
+                </a:solidFill>
                 <a:highlight>
                   <a:srgbClr val="FFFF00"/>
                 </a:highlight>
@@ -4938,56 +5264,24 @@
               <a:t>~=</a:t>
             </a:r>
             <a:r>
-              <a:rPr lang="sk-SK" dirty="0"/>
+              <a:rPr lang="sk-SK" dirty="0">
+                <a:solidFill>
+                  <a:srgbClr val="FF0000"/>
+                </a:solidFill>
+              </a:rPr>
               <a:t>, </a:t>
             </a:r>
             <a:r>
               <a:rPr lang="sk-SK" dirty="0">
+                <a:solidFill>
+                  <a:srgbClr val="FF0000"/>
+                </a:solidFill>
                 <a:highlight>
                   <a:srgbClr val="FFFF00"/>
                 </a:highlight>
                 <a:latin typeface="Consolas" panose="020B0609020204030204" pitchFamily="49" charset="0"/>
               </a:rPr>
-              <a:t>&gt;</a:t>
-            </a:r>
-            <a:r>
-              <a:rPr lang="sk-SK" dirty="0"/>
-              <a:t>, </a:t>
-            </a:r>
-            <a:r>
-              <a:rPr lang="sk-SK" dirty="0">
-                <a:highlight>
-                  <a:srgbClr val="FFFF00"/>
-                </a:highlight>
-                <a:latin typeface="Consolas" panose="020B0609020204030204" pitchFamily="49" charset="0"/>
-              </a:rPr>
               <a:t>&gt;=</a:t>
-            </a:r>
-            <a:r>
-              <a:rPr lang="sk-SK" dirty="0"/>
-              <a:t>, </a:t>
-            </a:r>
-            <a:r>
-              <a:rPr lang="sk-SK" dirty="0">
-                <a:highlight>
-                  <a:srgbClr val="FFFF00"/>
-                </a:highlight>
-                <a:latin typeface="Consolas" panose="020B0609020204030204" pitchFamily="49" charset="0"/>
-              </a:rPr>
-              <a:t>&lt;</a:t>
-            </a:r>
-            <a:r>
-              <a:rPr lang="sk-SK" dirty="0"/>
-              <a:t>, </a:t>
-            </a:r>
-            <a:r>
-              <a:rPr lang="sk-SK" dirty="0">
-                <a:highlight>
-                  <a:srgbClr val="FFFF00"/>
-                </a:highlight>
-                <a:latin typeface="Consolas" panose="020B0609020204030204" pitchFamily="49" charset="0"/>
-              </a:rPr>
-              <a:t>&lt;=</a:t>
             </a:r>
             <a:r>
               <a:rPr lang="sk-SK" dirty="0"/>
@@ -5004,6 +5298,18 @@
               </a:spcBef>
               <a:buNone/>
             </a:pPr>
+            <a:endParaRPr lang="sk-SK" dirty="0"/>
+          </a:p>
+          <a:p>
+            <a:pPr marL="0" indent="0">
+              <a:lnSpc>
+                <a:spcPct val="110000"/>
+              </a:lnSpc>
+              <a:spcBef>
+                <a:spcPts val="1200"/>
+              </a:spcBef>
+              <a:buNone/>
+            </a:pPr>
             <a:r>
               <a:rPr lang="sk-SK" dirty="0"/>
               <a:t>Ak mám súbor </a:t>
@@ -5019,10 +5325,24 @@
             </a:r>
             <a:r>
               <a:rPr lang="sk-SK" dirty="0"/>
-              <a:t>, závislosti nainštalujem pomocou </a:t>
+              <a:t>, </a:t>
+            </a:r>
+            <a:r>
+              <a:rPr lang="sk-SK" dirty="0">
+                <a:solidFill>
+                  <a:srgbClr val="FF0000"/>
+                </a:solidFill>
+                <a:highlight>
+                  <a:srgbClr val="00FFFF"/>
+                </a:highlight>
+              </a:rPr>
+              <a:t>závislosti nainštalujem pomocou </a:t>
             </a:r>
             <a:r>
               <a:rPr lang="sk-SK" dirty="0" err="1">
+                <a:solidFill>
+                  <a:srgbClr val="FF0000"/>
+                </a:solidFill>
                 <a:highlight>
                   <a:srgbClr val="FFFF00"/>
                 </a:highlight>
@@ -5032,6 +5352,9 @@
             </a:r>
             <a:r>
               <a:rPr lang="sk-SK" dirty="0">
+                <a:solidFill>
+                  <a:srgbClr val="FF0000"/>
+                </a:solidFill>
                 <a:highlight>
                   <a:srgbClr val="FFFF00"/>
                 </a:highlight>
@@ -5041,6 +5364,9 @@
             </a:r>
             <a:r>
               <a:rPr lang="sk-SK" dirty="0" err="1">
+                <a:solidFill>
+                  <a:srgbClr val="FF0000"/>
+                </a:solidFill>
                 <a:highlight>
                   <a:srgbClr val="FFFF00"/>
                 </a:highlight>
@@ -5050,6 +5376,9 @@
             </a:r>
             <a:r>
               <a:rPr lang="sk-SK" dirty="0">
+                <a:solidFill>
+                  <a:srgbClr val="FF0000"/>
+                </a:solidFill>
                 <a:highlight>
                   <a:srgbClr val="FFFF00"/>
                 </a:highlight>
@@ -5082,7 +5411,14 @@
           <a:lstStyle/>
           <a:p>
             <a:r>
-              <a:rPr lang="sk-SK" dirty="0"/>
+              <a:rPr lang="sk-SK" dirty="0">
+                <a:solidFill>
+                  <a:srgbClr val="FF0000"/>
+                </a:solidFill>
+                <a:highlight>
+                  <a:srgbClr val="00FFFF"/>
+                </a:highlight>
+              </a:rPr>
               <a:t>requirements.txt</a:t>
             </a:r>
           </a:p>
@@ -5167,8 +5503,15 @@
               <a:buNone/>
             </a:pPr>
             <a:r>
-              <a:rPr lang="sk-SK" dirty="0"/>
-              <a:t>Moderný spôsob konfigurácie projektu</a:t>
+              <a:rPr lang="sk-SK" dirty="0">
+                <a:solidFill>
+                  <a:srgbClr val="FF0000"/>
+                </a:solidFill>
+                <a:highlight>
+                  <a:srgbClr val="00FFFF"/>
+                </a:highlight>
+              </a:rPr>
+              <a:t>Moderný spôsob pre projekty</a:t>
             </a:r>
           </a:p>
           <a:p>
@@ -5179,8 +5522,19 @@
               <a:buNone/>
             </a:pPr>
             <a:r>
+              <a:rPr lang="sk-SK" dirty="0">
+                <a:solidFill>
+                  <a:srgbClr val="FF0000"/>
+                </a:solidFill>
+                <a:highlight>
+                  <a:srgbClr val="00FFFF"/>
+                </a:highlight>
+              </a:rPr>
+              <a:t>Musím uviesť názov môjho projektu a verziu</a:t>
+            </a:r>
+            <a:r>
               <a:rPr lang="sk-SK" dirty="0"/>
-              <a:t>V súbore musím uviesť minimálne názov môjho projektu a verziu.</a:t>
+              <a:t>.</a:t>
             </a:r>
           </a:p>
           <a:p>
@@ -5191,11 +5545,21 @@
               <a:buNone/>
             </a:pPr>
             <a:r>
-              <a:rPr lang="sk-SK" dirty="0"/>
-              <a:t>Závislosti na knižniciach uvádzam do atribútu </a:t>
+              <a:rPr lang="sk-SK" dirty="0">
+                <a:solidFill>
+                  <a:srgbClr val="FF0000"/>
+                </a:solidFill>
+                <a:highlight>
+                  <a:srgbClr val="00FFFF"/>
+                </a:highlight>
+              </a:rPr>
+              <a:t>Závislosti uvádzam do atribútu </a:t>
             </a:r>
             <a:r>
               <a:rPr lang="sk-SK" dirty="0" err="1">
+                <a:solidFill>
+                  <a:srgbClr val="FF0000"/>
+                </a:solidFill>
                 <a:highlight>
                   <a:srgbClr val="FFFF00"/>
                 </a:highlight>
@@ -5204,6 +5568,9 @@
               <a:t>dependencies</a:t>
             </a:r>
             <a:endParaRPr lang="sk-SK" dirty="0">
+              <a:solidFill>
+                <a:srgbClr val="FF0000"/>
+              </a:solidFill>
               <a:highlight>
                 <a:srgbClr val="FFFF00"/>
               </a:highlight>
@@ -5217,12 +5584,31 @@
               </a:spcBef>
               <a:buNone/>
             </a:pPr>
-            <a:r>
-              <a:rPr lang="sk-SK" dirty="0"/>
+            <a:endParaRPr lang="sk-SK" dirty="0"/>
+          </a:p>
+          <a:p>
+            <a:pPr marL="0" indent="0">
+              <a:spcBef>
+                <a:spcPts val="1200"/>
+              </a:spcBef>
+              <a:buNone/>
+            </a:pPr>
+            <a:r>
+              <a:rPr lang="sk-SK" dirty="0">
+                <a:solidFill>
+                  <a:srgbClr val="FF0000"/>
+                </a:solidFill>
+                <a:highlight>
+                  <a:srgbClr val="00FFFF"/>
+                </a:highlight>
+              </a:rPr>
               <a:t>Lokálne nainštalujem príkazom </a:t>
             </a:r>
             <a:r>
               <a:rPr lang="sk-SK" dirty="0" err="1">
+                <a:solidFill>
+                  <a:srgbClr val="FF0000"/>
+                </a:solidFill>
                 <a:highlight>
                   <a:srgbClr val="FFFF00"/>
                 </a:highlight>
@@ -5232,6 +5618,9 @@
             </a:r>
             <a:r>
               <a:rPr lang="sk-SK" dirty="0">
+                <a:solidFill>
+                  <a:srgbClr val="FF0000"/>
+                </a:solidFill>
                 <a:highlight>
                   <a:srgbClr val="FFFF00"/>
                 </a:highlight>
@@ -5241,6 +5630,9 @@
             </a:r>
             <a:r>
               <a:rPr lang="sk-SK" dirty="0" err="1">
+                <a:solidFill>
+                  <a:srgbClr val="FF0000"/>
+                </a:solidFill>
                 <a:highlight>
                   <a:srgbClr val="FFFF00"/>
                 </a:highlight>
@@ -5250,6 +5642,9 @@
             </a:r>
             <a:r>
               <a:rPr lang="sk-SK" dirty="0">
+                <a:solidFill>
+                  <a:srgbClr val="FF0000"/>
+                </a:solidFill>
                 <a:highlight>
                   <a:srgbClr val="FFFF00"/>
                 </a:highlight>
@@ -5282,10 +5677,24 @@
           <a:lstStyle/>
           <a:p>
             <a:r>
-              <a:rPr lang="sk-SK" dirty="0" err="1"/>
+              <a:rPr lang="sk-SK" dirty="0" err="1">
+                <a:solidFill>
+                  <a:srgbClr val="FF0000"/>
+                </a:solidFill>
+                <a:highlight>
+                  <a:srgbClr val="00FFFF"/>
+                </a:highlight>
+              </a:rPr>
               <a:t>pyproject.toml</a:t>
             </a:r>
-            <a:endParaRPr lang="sk-SK" dirty="0"/>
+            <a:endParaRPr lang="sk-SK" dirty="0">
+              <a:solidFill>
+                <a:srgbClr val="FF0000"/>
+              </a:solidFill>
+              <a:highlight>
+                <a:srgbClr val="00FFFF"/>
+              </a:highlight>
+            </a:endParaRPr>
           </a:p>
         </p:txBody>
       </p:sp>

--- a/prezentacie/p05w.pptx
+++ b/prezentacie/p05w.pptx
@@ -250,7 +250,7 @@
           <a:p>
             <a:fld id="{10052495-8BC8-4CFB-94B1-B0429F101A0D}" type="datetimeFigureOut">
               <a:rPr lang="sk-SK" smtClean="0"/>
-              <a:t>28. 9. 2026</a:t>
+              <a:t>5. 10. 2026</a:t>
             </a:fld>
             <a:endParaRPr lang="sk-SK"/>
           </a:p>
@@ -420,7 +420,7 @@
           <a:p>
             <a:fld id="{10052495-8BC8-4CFB-94B1-B0429F101A0D}" type="datetimeFigureOut">
               <a:rPr lang="sk-SK" smtClean="0"/>
-              <a:t>28. 9. 2026</a:t>
+              <a:t>5. 10. 2026</a:t>
             </a:fld>
             <a:endParaRPr lang="sk-SK"/>
           </a:p>
@@ -600,7 +600,7 @@
           <a:p>
             <a:fld id="{10052495-8BC8-4CFB-94B1-B0429F101A0D}" type="datetimeFigureOut">
               <a:rPr lang="sk-SK" smtClean="0"/>
-              <a:t>28. 9. 2026</a:t>
+              <a:t>5. 10. 2026</a:t>
             </a:fld>
             <a:endParaRPr lang="sk-SK"/>
           </a:p>
@@ -770,7 +770,7 @@
           <a:p>
             <a:fld id="{10052495-8BC8-4CFB-94B1-B0429F101A0D}" type="datetimeFigureOut">
               <a:rPr lang="sk-SK" smtClean="0"/>
-              <a:t>28. 9. 2026</a:t>
+              <a:t>5. 10. 2026</a:t>
             </a:fld>
             <a:endParaRPr lang="sk-SK"/>
           </a:p>
@@ -1016,7 +1016,7 @@
           <a:p>
             <a:fld id="{10052495-8BC8-4CFB-94B1-B0429F101A0D}" type="datetimeFigureOut">
               <a:rPr lang="sk-SK" smtClean="0"/>
-              <a:t>28. 9. 2026</a:t>
+              <a:t>5. 10. 2026</a:t>
             </a:fld>
             <a:endParaRPr lang="sk-SK"/>
           </a:p>
@@ -1248,7 +1248,7 @@
           <a:p>
             <a:fld id="{10052495-8BC8-4CFB-94B1-B0429F101A0D}" type="datetimeFigureOut">
               <a:rPr lang="sk-SK" smtClean="0"/>
-              <a:t>28. 9. 2026</a:t>
+              <a:t>5. 10. 2026</a:t>
             </a:fld>
             <a:endParaRPr lang="sk-SK"/>
           </a:p>
@@ -1615,7 +1615,7 @@
           <a:p>
             <a:fld id="{10052495-8BC8-4CFB-94B1-B0429F101A0D}" type="datetimeFigureOut">
               <a:rPr lang="sk-SK" smtClean="0"/>
-              <a:t>28. 9. 2026</a:t>
+              <a:t>5. 10. 2026</a:t>
             </a:fld>
             <a:endParaRPr lang="sk-SK"/>
           </a:p>
@@ -1733,7 +1733,7 @@
           <a:p>
             <a:fld id="{10052495-8BC8-4CFB-94B1-B0429F101A0D}" type="datetimeFigureOut">
               <a:rPr lang="sk-SK" smtClean="0"/>
-              <a:t>28. 9. 2026</a:t>
+              <a:t>5. 10. 2026</a:t>
             </a:fld>
             <a:endParaRPr lang="sk-SK"/>
           </a:p>
@@ -1828,7 +1828,7 @@
           <a:p>
             <a:fld id="{10052495-8BC8-4CFB-94B1-B0429F101A0D}" type="datetimeFigureOut">
               <a:rPr lang="sk-SK" smtClean="0"/>
-              <a:t>28. 9. 2026</a:t>
+              <a:t>5. 10. 2026</a:t>
             </a:fld>
             <a:endParaRPr lang="sk-SK"/>
           </a:p>
@@ -2105,7 +2105,7 @@
           <a:p>
             <a:fld id="{10052495-8BC8-4CFB-94B1-B0429F101A0D}" type="datetimeFigureOut">
               <a:rPr lang="sk-SK" smtClean="0"/>
-              <a:t>28. 9. 2026</a:t>
+              <a:t>5. 10. 2026</a:t>
             </a:fld>
             <a:endParaRPr lang="sk-SK"/>
           </a:p>
@@ -2362,7 +2362,7 @@
           <a:p>
             <a:fld id="{10052495-8BC8-4CFB-94B1-B0429F101A0D}" type="datetimeFigureOut">
               <a:rPr lang="sk-SK" smtClean="0"/>
-              <a:t>28. 9. 2026</a:t>
+              <a:t>5. 10. 2026</a:t>
             </a:fld>
             <a:endParaRPr lang="sk-SK"/>
           </a:p>
@@ -2575,7 +2575,7 @@
           <a:p>
             <a:fld id="{10052495-8BC8-4CFB-94B1-B0429F101A0D}" type="datetimeFigureOut">
               <a:rPr lang="sk-SK" smtClean="0"/>
-              <a:t>28. 9. 2026</a:t>
+              <a:t>5. 10. 2026</a:t>
             </a:fld>
             <a:endParaRPr lang="sk-SK"/>
           </a:p>
